--- a/企画書（仮）.pptx
+++ b/企画書（仮）.pptx
@@ -7,8 +7,9 @@
   <p:sldIdLst>
     <p:sldId id="261" r:id="rId2"/>
     <p:sldId id="262" r:id="rId3"/>
-    <p:sldId id="263" r:id="rId4"/>
-    <p:sldId id="264" r:id="rId5"/>
+    <p:sldId id="265" r:id="rId4"/>
+    <p:sldId id="263" r:id="rId5"/>
+    <p:sldId id="264" r:id="rId6"/>
   </p:sldIdLst>
   <p:sldSz cx="6858000" cy="9906000" type="A4"/>
   <p:notesSz cx="6858000" cy="9144000"/>
@@ -107,6 +108,11 @@
       </a:defRPr>
     </a:lvl9pPr>
   </p:defaultTextStyle>
+  <p:extLst>
+    <p:ext uri="{EFAFB233-063F-42B5-8137-9DF3F51BA10A}">
+      <p15:sldGuideLst xmlns:p15="http://schemas.microsoft.com/office/powerpoint/2012/main"/>
+    </p:ext>
+  </p:extLst>
 </p:presentation>
 </file>
 
@@ -3348,6 +3354,14 @@
             <a:pPr algn="ctr"/>
             <a:r>
               <a:rPr lang="ja-JP" altLang="en-US" dirty="0"/>
+              <a:t>ゲーム設計（必要なシステム）</a:t>
+            </a:r>
+            <a:endParaRPr kumimoji="1" lang="en-US" altLang="ja-JP" dirty="0"/>
+          </a:p>
+          <a:p>
+            <a:pPr algn="ctr"/>
+            <a:r>
+              <a:rPr lang="ja-JP" altLang="en-US" dirty="0"/>
               <a:t>ゲーム設計（全体）</a:t>
             </a:r>
             <a:endParaRPr lang="en-US" altLang="ja-JP" dirty="0"/>
@@ -3941,7 +3955,7 @@
           <p:cNvPr id="2" name="タイトル 1">
             <a:extLst>
               <a:ext uri="{FF2B5EF4-FFF2-40B4-BE49-F238E27FC236}">
-                <a16:creationId xmlns:a16="http://schemas.microsoft.com/office/drawing/2014/main" id="{DC415750-CB36-41AD-BD6C-D70565B94109}"/>
+                <a16:creationId xmlns:a16="http://schemas.microsoft.com/office/drawing/2014/main" id="{B63449A9-DAE2-4BD0-B1E0-A83584CF4F63}"/>
               </a:ext>
             </a:extLst>
           </p:cNvPr>
@@ -3954,15 +3968,13 @@
         </p:nvSpPr>
         <p:spPr/>
         <p:txBody>
-          <a:bodyPr>
-            <a:normAutofit/>
-          </a:bodyPr>
+          <a:bodyPr/>
           <a:lstStyle/>
           <a:p>
             <a:pPr algn="ctr"/>
             <a:r>
-              <a:rPr kumimoji="1" lang="ja-JP" altLang="en-US" sz="4400" dirty="0"/>
-              <a:t>ゲーム設計（マップ）</a:t>
+              <a:rPr kumimoji="1" lang="ja-JP" altLang="en-US" dirty="0"/>
+              <a:t>ゲーム企画（システム）</a:t>
             </a:r>
           </a:p>
         </p:txBody>
@@ -3972,7 +3984,7 @@
           <p:cNvPr id="3" name="コンテンツ プレースホルダー 2">
             <a:extLst>
               <a:ext uri="{FF2B5EF4-FFF2-40B4-BE49-F238E27FC236}">
-                <a16:creationId xmlns:a16="http://schemas.microsoft.com/office/drawing/2014/main" id="{4E7C464F-FF3D-432B-89C8-ADD9071921A8}"/>
+                <a16:creationId xmlns:a16="http://schemas.microsoft.com/office/drawing/2014/main" id="{F985F1B0-333D-4C7A-ABEF-6DA628EE16B4}"/>
               </a:ext>
             </a:extLst>
           </p:cNvPr>
@@ -3985,8 +3997,8 @@
         </p:nvSpPr>
         <p:spPr>
           <a:xfrm>
-            <a:off x="471487" y="2637014"/>
-            <a:ext cx="5915025" cy="6285266"/>
+            <a:off x="471488" y="2637014"/>
+            <a:ext cx="5915024" cy="6285266"/>
           </a:xfrm>
         </p:spPr>
         <p:txBody>
@@ -3998,20 +4010,79 @@
             </a:pPr>
             <a:r>
               <a:rPr kumimoji="1" lang="ja-JP" altLang="en-US" dirty="0"/>
-              <a:t>ハブを</a:t>
-            </a:r>
+              <a:t>ウィンドウ設計</a:t>
+            </a:r>
+            <a:endParaRPr kumimoji="1" lang="en-US" altLang="ja-JP" dirty="0"/>
+          </a:p>
+          <a:p>
+            <a:pPr marL="0" indent="0" algn="ctr">
+              <a:buNone/>
+            </a:pPr>
             <a:r>
               <a:rPr lang="ja-JP" altLang="en-US" dirty="0"/>
-              <a:t>用いてあまり迷わないように</a:t>
+              <a:t>サウンドマネージャー</a:t>
+            </a:r>
+            <a:endParaRPr lang="en-US" altLang="ja-JP" dirty="0"/>
+          </a:p>
+          <a:p>
+            <a:pPr marL="0" indent="0" algn="ctr">
+              <a:buNone/>
+            </a:pPr>
+            <a:r>
+              <a:rPr kumimoji="1" lang="ja-JP" altLang="en-US" dirty="0"/>
+              <a:t>シーンマネージャー</a:t>
             </a:r>
             <a:endParaRPr kumimoji="1" lang="en-US" altLang="ja-JP" dirty="0"/>
+          </a:p>
+          <a:p>
+            <a:pPr marL="0" indent="0" algn="ctr">
+              <a:buNone/>
+            </a:pPr>
+            <a:r>
+              <a:rPr lang="ja-JP" altLang="en-US" dirty="0"/>
+              <a:t>あたり判定マネージャー</a:t>
+            </a:r>
+            <a:endParaRPr lang="en-US" altLang="ja-JP" dirty="0"/>
+          </a:p>
+          <a:p>
+            <a:pPr marL="0" indent="0" algn="ctr">
+              <a:buNone/>
+            </a:pPr>
+            <a:r>
+              <a:rPr kumimoji="1" lang="ja-JP" altLang="en-US" dirty="0"/>
+              <a:t>描画マネージャー</a:t>
+            </a:r>
+            <a:endParaRPr kumimoji="1" lang="en-US" altLang="ja-JP" dirty="0"/>
+          </a:p>
+          <a:p>
+            <a:pPr marL="0" indent="0" algn="ctr">
+              <a:buNone/>
+            </a:pPr>
+            <a:r>
+              <a:rPr lang="en-US" altLang="ja-JP" dirty="0"/>
+              <a:t>UI</a:t>
+            </a:r>
+            <a:r>
+              <a:rPr lang="ja-JP" altLang="en-US" dirty="0"/>
+              <a:t>マネージャー</a:t>
+            </a:r>
+            <a:endParaRPr lang="en-US" altLang="ja-JP" dirty="0"/>
+          </a:p>
+          <a:p>
+            <a:pPr marL="0" indent="0" algn="ctr">
+              <a:buNone/>
+            </a:pPr>
+            <a:r>
+              <a:rPr kumimoji="1" lang="ja-JP" altLang="en-US" dirty="0"/>
+              <a:t>キャンバスマネージャー</a:t>
+            </a:r>
           </a:p>
         </p:txBody>
       </p:sp>
     </p:spTree>
     <p:extLst>
       <p:ext uri="{BB962C8B-B14F-4D97-AF65-F5344CB8AC3E}">
-        <p14:creationId xmlns:p14="http://schemas.microsoft.com/office/powerpoint/2010/main" val="683423999"/>
+        <p14:creationId xmlns:p14="http://schemas.microsoft.com/office/powerpoint/2010/main" val="220486548"/>
       </p:ext>
     </p:extLst>
   </p:cSld>
@@ -4043,6 +4114,108 @@
           <p:cNvPr id="2" name="タイトル 1">
             <a:extLst>
               <a:ext uri="{FF2B5EF4-FFF2-40B4-BE49-F238E27FC236}">
+                <a16:creationId xmlns:a16="http://schemas.microsoft.com/office/drawing/2014/main" id="{DC415750-CB36-41AD-BD6C-D70565B94109}"/>
+              </a:ext>
+            </a:extLst>
+          </p:cNvPr>
+          <p:cNvSpPr>
+            <a:spLocks noGrp="1"/>
+          </p:cNvSpPr>
+          <p:nvPr>
+            <p:ph type="title"/>
+          </p:nvPr>
+        </p:nvSpPr>
+        <p:spPr/>
+        <p:txBody>
+          <a:bodyPr>
+            <a:normAutofit/>
+          </a:bodyPr>
+          <a:lstStyle/>
+          <a:p>
+            <a:pPr algn="ctr"/>
+            <a:r>
+              <a:rPr kumimoji="1" lang="ja-JP" altLang="en-US" sz="4400" dirty="0"/>
+              <a:t>ゲーム設計（マップ）</a:t>
+            </a:r>
+          </a:p>
+        </p:txBody>
+      </p:sp>
+      <p:sp>
+        <p:nvSpPr>
+          <p:cNvPr id="3" name="コンテンツ プレースホルダー 2">
+            <a:extLst>
+              <a:ext uri="{FF2B5EF4-FFF2-40B4-BE49-F238E27FC236}">
+                <a16:creationId xmlns:a16="http://schemas.microsoft.com/office/drawing/2014/main" id="{4E7C464F-FF3D-432B-89C8-ADD9071921A8}"/>
+              </a:ext>
+            </a:extLst>
+          </p:cNvPr>
+          <p:cNvSpPr>
+            <a:spLocks noGrp="1"/>
+          </p:cNvSpPr>
+          <p:nvPr>
+            <p:ph sz="half" idx="1"/>
+          </p:nvPr>
+        </p:nvSpPr>
+        <p:spPr>
+          <a:xfrm>
+            <a:off x="471487" y="2637014"/>
+            <a:ext cx="5915025" cy="6285266"/>
+          </a:xfrm>
+        </p:spPr>
+        <p:txBody>
+          <a:bodyPr/>
+          <a:lstStyle/>
+          <a:p>
+            <a:pPr marL="0" indent="0" algn="ctr">
+              <a:buNone/>
+            </a:pPr>
+            <a:r>
+              <a:rPr kumimoji="1" lang="ja-JP" altLang="en-US" dirty="0"/>
+              <a:t>ハブを</a:t>
+            </a:r>
+            <a:r>
+              <a:rPr lang="ja-JP" altLang="en-US" dirty="0"/>
+              <a:t>用いてあまり迷わないように</a:t>
+            </a:r>
+            <a:endParaRPr kumimoji="1" lang="en-US" altLang="ja-JP" dirty="0"/>
+          </a:p>
+        </p:txBody>
+      </p:sp>
+    </p:spTree>
+    <p:extLst>
+      <p:ext uri="{BB962C8B-B14F-4D97-AF65-F5344CB8AC3E}">
+        <p14:creationId xmlns:p14="http://schemas.microsoft.com/office/powerpoint/2010/main" val="683423999"/>
+      </p:ext>
+    </p:extLst>
+  </p:cSld>
+  <p:clrMapOvr>
+    <a:masterClrMapping/>
+  </p:clrMapOvr>
+</p:sld>
+</file>
+
+<file path=ppt/slides/slide5.xml><?xml version="1.0" encoding="utf-8"?>
+<p:sld xmlns:a="http://schemas.openxmlformats.org/drawingml/2006/main" xmlns:r="http://schemas.openxmlformats.org/officeDocument/2006/relationships" xmlns:p="http://schemas.openxmlformats.org/presentationml/2006/main">
+  <p:cSld>
+    <p:spTree>
+      <p:nvGrpSpPr>
+        <p:cNvPr id="1" name=""/>
+        <p:cNvGrpSpPr/>
+        <p:nvPr/>
+      </p:nvGrpSpPr>
+      <p:grpSpPr>
+        <a:xfrm>
+          <a:off x="0" y="0"/>
+          <a:ext cx="0" cy="0"/>
+          <a:chOff x="0" y="0"/>
+          <a:chExt cx="0" cy="0"/>
+        </a:xfrm>
+      </p:grpSpPr>
+      <p:sp>
+        <p:nvSpPr>
+          <p:cNvPr id="2" name="タイトル 1">
+            <a:extLst>
+              <a:ext uri="{FF2B5EF4-FFF2-40B4-BE49-F238E27FC236}">
                 <a16:creationId xmlns:a16="http://schemas.microsoft.com/office/drawing/2014/main" id="{5E9E1DB1-E17F-4C29-8CFF-DAE03D396D6C}"/>
               </a:ext>
             </a:extLst>
@@ -4090,7 +4263,7 @@
           <a:bodyPr/>
           <a:lstStyle/>
           <a:p>
-            <a:endParaRPr kumimoji="1" lang="ja-JP" altLang="en-US"/>
+            <a:endParaRPr kumimoji="1" lang="ja-JP" altLang="en-US" dirty="0"/>
           </a:p>
         </p:txBody>
       </p:sp>
